--- a/poster/poster_dark_7deg.pptx
+++ b/poster/poster_dark_7deg.pptx
@@ -5437,7 +5437,7 @@
                 </a:solidFill>
                 <a:latin typeface="Arial"/>
               </a:rPr>
-              <a:t>look direction in a frame that turns with Earth (x⊕ = Sun → Earth)</a:t>
+              <a:t>Earth-following frame: x⊕ = Sun → Earth, y⊕ = Earth's motion</a:t>
             </a:r>
           </a:p>
         </p:txBody>

--- a/poster/poster_dark_7deg.pptx
+++ b/poster/poster_dark_7deg.pptx
@@ -4195,7 +4195,7 @@
         <p:spPr>
           <a:xfrm>
             <a:off x="1143000" y="10596676"/>
-            <a:ext cx="7705648" cy="4671364"/>
+            <a:ext cx="7705648" cy="5066385"/>
           </a:xfrm>
           <a:prstGeom prst="rect">
             <a:avLst/>
@@ -4274,7 +4274,7 @@
                 </a:solidFill>
                 <a:latin typeface="Arial"/>
               </a:rPr>
-              <a:t>Bright enough to be confused with faint light from distant galaxies</a:t>
+              <a:t>Far brighter than the faint glow of distant galaxies SPHEREx aims to measure</a:t>
             </a:r>
           </a:p>
           <a:p>
@@ -4298,7 +4298,7 @@
                 </a:solidFill>
                 <a:latin typeface="Arial"/>
               </a:rPr>
-              <a:t>Changes with look direction and Earth's place in orbit → </a:t>
+              <a:t>Changes with pointing and Earth's place in orbit → </a:t>
             </a:r>
             <a:r>
               <a:rPr sz="2400" b="1">
@@ -4371,7 +4371,7 @@
                 </a:solidFill>
                 <a:latin typeface="Arial"/>
               </a:rPr>
-              <a:t> computes what SPHEREx would see from it</a:t>
+              <a:t> evaluates its prediction of the zodiacal-light contribution to what SPHEREx observes</a:t>
             </a:r>
           </a:p>
         </p:txBody>
@@ -4535,7 +4535,7 @@
         <p:spPr>
           <a:xfrm>
             <a:off x="731520" y="23017337"/>
-            <a:ext cx="15361920" cy="2963716"/>
+            <a:ext cx="15361920" cy="3399885"/>
           </a:xfrm>
           <a:prstGeom prst="rect">
             <a:avLst/>
@@ -4581,7 +4581,7 @@
         <p:spPr>
           <a:xfrm>
             <a:off x="1143000" y="23218505"/>
-            <a:ext cx="7040880" cy="1953158"/>
+            <a:ext cx="7040880" cy="2776118"/>
           </a:xfrm>
           <a:prstGeom prst="rect">
             <a:avLst/>
@@ -4636,7 +4636,7 @@
                 </a:solidFill>
                 <a:latin typeface="Arial"/>
               </a:rPr>
-              <a:t>Zodiacal light must be removed from every SPHEREx image, but models like Kelsall's were fit to older data and leave errors behind</a:t>
+              <a:t>Zodiacal light must be removed from every SPHEREx image, but Kelsall's model uses a finite number of analytic components that don't fully describe the spatial and spectral structure in real data</a:t>
             </a:r>
           </a:p>
         </p:txBody>
@@ -4754,8 +4754,8 @@
         </p:nvSpPr>
         <p:spPr>
           <a:xfrm>
-            <a:off x="731520" y="26392534"/>
-            <a:ext cx="15361920" cy="13841065"/>
+            <a:off x="731520" y="26828703"/>
+            <a:ext cx="15361920" cy="13404896"/>
           </a:xfrm>
           <a:prstGeom prst="rect">
             <a:avLst/>
@@ -4800,7 +4800,7 @@
         </p:nvSpPr>
         <p:spPr>
           <a:xfrm>
-            <a:off x="731520" y="26392534"/>
+            <a:off x="731520" y="26828703"/>
             <a:ext cx="15361920" cy="1051560"/>
           </a:xfrm>
           <a:prstGeom prst="rect">
@@ -4844,7 +4844,7 @@
         </p:nvSpPr>
         <p:spPr>
           <a:xfrm>
-            <a:off x="731520" y="26392534"/>
+            <a:off x="731520" y="26828703"/>
             <a:ext cx="15361920" cy="1051560"/>
           </a:xfrm>
           <a:prstGeom prst="rect">
@@ -4886,8 +4886,8 @@
         </p:nvSpPr>
         <p:spPr>
           <a:xfrm>
-            <a:off x="1143000" y="28838321"/>
-            <a:ext cx="6000695" cy="3675278"/>
+            <a:off x="1143000" y="29082481"/>
+            <a:ext cx="7181258" cy="3263798"/>
           </a:xfrm>
           <a:prstGeom prst="rect">
             <a:avLst/>
@@ -4942,7 +4942,7 @@
                 </a:solidFill>
                 <a:latin typeface="Arial"/>
               </a:rPr>
-              <a:t>No dates or sky-map positions: only </a:t>
+              <a:t>No dates or sky coordinates: only </a:t>
             </a:r>
             <a:r>
               <a:rPr sz="2500" b="1">
@@ -4960,7 +4960,7 @@
                 </a:solidFill>
                 <a:latin typeface="Arial"/>
               </a:rPr>
-              <a:t> (Fig. 3)</a:t>
+              <a:t> (Fig. 3), dot products of the pointing vector n</a:t>
             </a:r>
           </a:p>
           <a:p>
@@ -5005,8 +5005,8 @@
         </p:blipFill>
         <p:spPr>
           <a:xfrm>
-            <a:off x="7418015" y="27866219"/>
-            <a:ext cx="8263944" cy="5619482"/>
+            <a:off x="8598578" y="28306030"/>
+            <a:ext cx="7083381" cy="4816699"/>
           </a:xfrm>
           <a:prstGeom prst="rect">
             <a:avLst/>
@@ -5021,8 +5021,8 @@
         </p:nvSpPr>
         <p:spPr>
           <a:xfrm>
-            <a:off x="1143000" y="33577141"/>
-            <a:ext cx="14538960" cy="749808"/>
+            <a:off x="1143000" y="33214170"/>
+            <a:ext cx="14538960" cy="1101852"/>
           </a:xfrm>
           <a:prstGeom prst="rect">
             <a:avLst/>
@@ -5059,7 +5059,7 @@
                 </a:solidFill>
                 <a:latin typeface="Arial"/>
               </a:rPr>
-              <a:t>The geometry the network sees (top view, not to scale): n = where SPHEREx looks; S, E = Sun → SPHEREx, Earth; v = orbital motion; λ⊕ = Earth's angle around its orbit. Jupiter and the Moon: context only.</a:t>
+              <a:t>The geometry the network sees (top view, not to scale): n = SPHEREx's pointing vector; S, E = SPHEREx, Earth positions; v = orbital motion; λ⊕ = Earth's angle around its orbit. Jupiter and the Moon are tracked for real data: dust clouds leading and trailing Jupiter, and moonlight.</a:t>
             </a:r>
           </a:p>
         </p:txBody>
@@ -5072,7 +5072,7 @@
         </p:nvSpPr>
         <p:spPr>
           <a:xfrm>
-            <a:off x="1143000" y="34611914"/>
+            <a:off x="1143000" y="34604629"/>
             <a:ext cx="14538960" cy="548640"/>
           </a:xfrm>
           <a:prstGeom prst="rect">
@@ -5114,7 +5114,7 @@
         </p:nvSpPr>
         <p:spPr>
           <a:xfrm>
-            <a:off x="1325880" y="35160554"/>
+            <a:off x="1325880" y="35153269"/>
             <a:ext cx="3291840" cy="457200"/>
           </a:xfrm>
           <a:prstGeom prst="rect">
@@ -5156,7 +5156,7 @@
         </p:nvSpPr>
         <p:spPr>
           <a:xfrm>
-            <a:off x="4617720" y="35160554"/>
+            <a:off x="4617720" y="35153269"/>
             <a:ext cx="11064240" cy="457200"/>
           </a:xfrm>
           <a:prstGeom prst="rect">
@@ -5198,7 +5198,7 @@
         </p:nvSpPr>
         <p:spPr>
           <a:xfrm>
-            <a:off x="1325880" y="35590322"/>
+            <a:off x="1325880" y="35583037"/>
             <a:ext cx="3291840" cy="457200"/>
           </a:xfrm>
           <a:prstGeom prst="rect">
@@ -5240,7 +5240,7 @@
         </p:nvSpPr>
         <p:spPr>
           <a:xfrm>
-            <a:off x="4617720" y="35590322"/>
+            <a:off x="4617720" y="35583037"/>
             <a:ext cx="11064240" cy="457200"/>
           </a:xfrm>
           <a:prstGeom prst="rect">
@@ -5282,7 +5282,7 @@
         </p:nvSpPr>
         <p:spPr>
           <a:xfrm>
-            <a:off x="1325880" y="36020090"/>
+            <a:off x="1325880" y="36012805"/>
             <a:ext cx="3291840" cy="457200"/>
           </a:xfrm>
           <a:prstGeom prst="rect">
@@ -5324,7 +5324,7 @@
         </p:nvSpPr>
         <p:spPr>
           <a:xfrm>
-            <a:off x="4617720" y="36020090"/>
+            <a:off x="4617720" y="36012805"/>
             <a:ext cx="11064240" cy="457200"/>
           </a:xfrm>
           <a:prstGeom prst="rect">
@@ -5366,7 +5366,7 @@
         </p:nvSpPr>
         <p:spPr>
           <a:xfrm>
-            <a:off x="1325880" y="36449858"/>
+            <a:off x="1325880" y="36442573"/>
             <a:ext cx="3291840" cy="457200"/>
           </a:xfrm>
           <a:prstGeom prst="rect">
@@ -5408,7 +5408,7 @@
         </p:nvSpPr>
         <p:spPr>
           <a:xfrm>
-            <a:off x="4617720" y="36449858"/>
+            <a:off x="4617720" y="36442573"/>
             <a:ext cx="11064240" cy="457200"/>
           </a:xfrm>
           <a:prstGeom prst="rect">
@@ -5450,7 +5450,7 @@
         </p:nvSpPr>
         <p:spPr>
           <a:xfrm>
-            <a:off x="1325880" y="36879626"/>
+            <a:off x="1325880" y="36872341"/>
             <a:ext cx="3291840" cy="457200"/>
           </a:xfrm>
           <a:prstGeom prst="rect">
@@ -5492,7 +5492,7 @@
         </p:nvSpPr>
         <p:spPr>
           <a:xfrm>
-            <a:off x="4617720" y="36879626"/>
+            <a:off x="4617720" y="36872341"/>
             <a:ext cx="11064240" cy="457200"/>
           </a:xfrm>
           <a:prstGeom prst="rect">
@@ -5534,7 +5534,7 @@
         </p:nvSpPr>
         <p:spPr>
           <a:xfrm>
-            <a:off x="1143000" y="37594359"/>
+            <a:off x="1143000" y="37590717"/>
             <a:ext cx="14538960" cy="2171395"/>
           </a:xfrm>
           <a:prstGeom prst="rect">
